--- a/files/teaching-resources/concordiacollege-busn-320/busn-320-lecture-note/busn320-ch04.pptx
+++ b/files/teaching-resources/concordiacollege-busn-320/busn-320-lecture-note/busn320-ch04.pptx
@@ -245,7 +245,7 @@
           <a:p>
             <a:fld id="{2D359EC7-19C7-4638-A61A-0E2B59861576}" type="datetimeFigureOut">
               <a:rPr lang="en-US" smtClean="0"/>
-              <a:t>7/22/2026</a:t>
+              <a:t>8/25/2026</a:t>
             </a:fld>
             <a:endParaRPr lang="en-US"/>
           </a:p>
@@ -1306,7 +1306,7 @@
           <a:p>
             <a:fld id="{1247A80A-D5D2-49AE-A844-588E4255EDC7}" type="datetime1">
               <a:rPr lang="en-US" smtClean="0"/>
-              <a:t>7/22/2026</a:t>
+              <a:t>8/25/2026</a:t>
             </a:fld>
             <a:endParaRPr lang="en-US"/>
           </a:p>
@@ -1477,7 +1477,7 @@
           <a:p>
             <a:fld id="{7B5895A3-83FA-4B14-A4CD-DB213D15B8AB}" type="datetime1">
               <a:rPr lang="en-US" smtClean="0"/>
-              <a:t>7/22/2026</a:t>
+              <a:t>8/25/2026</a:t>
             </a:fld>
             <a:endParaRPr lang="en-US"/>
           </a:p>
@@ -1658,7 +1658,7 @@
           <a:p>
             <a:fld id="{470A4B72-8FE6-4D0E-A593-D1637FA9144D}" type="datetime1">
               <a:rPr lang="en-US" smtClean="0"/>
-              <a:t>7/22/2026</a:t>
+              <a:t>8/25/2026</a:t>
             </a:fld>
             <a:endParaRPr lang="en-US"/>
           </a:p>
@@ -1829,7 +1829,7 @@
           <a:p>
             <a:fld id="{5C380916-4781-41E1-812B-F7EE09E7EC54}" type="datetime1">
               <a:rPr lang="en-US" smtClean="0"/>
-              <a:t>7/22/2026</a:t>
+              <a:t>8/25/2026</a:t>
             </a:fld>
             <a:endParaRPr lang="en-US"/>
           </a:p>
@@ -2077,7 +2077,7 @@
           <a:p>
             <a:fld id="{3D4F0C0A-9C35-410E-849D-9EEF5817A513}" type="datetime1">
               <a:rPr lang="en-US" smtClean="0"/>
-              <a:t>7/22/2026</a:t>
+              <a:t>8/25/2026</a:t>
             </a:fld>
             <a:endParaRPr lang="en-US"/>
           </a:p>
@@ -2365,7 +2365,7 @@
           <a:p>
             <a:fld id="{39B32F21-B93A-4F6F-BB58-7315062EDE8F}" type="datetime1">
               <a:rPr lang="en-US" smtClean="0"/>
-              <a:t>7/22/2026</a:t>
+              <a:t>8/25/2026</a:t>
             </a:fld>
             <a:endParaRPr lang="en-US"/>
           </a:p>
@@ -2787,7 +2787,7 @@
           <a:p>
             <a:fld id="{9718F068-B914-460D-9179-BFF897ADE07D}" type="datetime1">
               <a:rPr lang="en-US" smtClean="0"/>
-              <a:t>7/22/2026</a:t>
+              <a:t>8/25/2026</a:t>
             </a:fld>
             <a:endParaRPr lang="en-US"/>
           </a:p>
@@ -2907,7 +2907,7 @@
           <a:p>
             <a:fld id="{6621F716-81BD-4BA4-B31F-E45934BDA10B}" type="datetime1">
               <a:rPr lang="en-US" smtClean="0"/>
-              <a:t>7/22/2026</a:t>
+              <a:t>8/25/2026</a:t>
             </a:fld>
             <a:endParaRPr lang="en-US"/>
           </a:p>
@@ -3005,7 +3005,7 @@
           <a:p>
             <a:fld id="{2BD6429A-3A32-4FA5-8083-C1241B40DC91}" type="datetime1">
               <a:rPr lang="en-US" smtClean="0"/>
-              <a:t>7/22/2026</a:t>
+              <a:t>8/25/2026</a:t>
             </a:fld>
             <a:endParaRPr lang="en-US"/>
           </a:p>
@@ -3283,7 +3283,7 @@
           <a:p>
             <a:fld id="{E93B8681-8559-4041-8182-1523BFD54070}" type="datetime1">
               <a:rPr lang="en-US" smtClean="0"/>
-              <a:t>7/22/2026</a:t>
+              <a:t>8/25/2026</a:t>
             </a:fld>
             <a:endParaRPr lang="en-US"/>
           </a:p>
@@ -3538,7 +3538,7 @@
           <a:p>
             <a:fld id="{DBAE741E-05A6-4FBA-B93A-7A6F416D9C37}" type="datetime1">
               <a:rPr lang="en-US" smtClean="0"/>
-              <a:t>7/22/2026</a:t>
+              <a:t>8/25/2026</a:t>
             </a:fld>
             <a:endParaRPr lang="en-US"/>
           </a:p>
@@ -3752,7 +3752,7 @@
           <a:p>
             <a:fld id="{066473EE-CD09-4566-AB4B-2AE3BA2B94C1}" type="datetime1">
               <a:rPr lang="en-US" smtClean="0"/>
-              <a:t>7/22/2026</a:t>
+              <a:t>8/25/2026</a:t>
             </a:fld>
             <a:endParaRPr lang="en-US"/>
           </a:p>
@@ -4341,10 +4341,7 @@
                 </a:pPr>
                 <a14:m>
                   <m:oMathPara xmlns:m="http://schemas.openxmlformats.org/officeDocument/2006/math">
-                    <m:oMathParaPr>
-                      <m:jc m:val="centerGroup"/>
-                    </m:oMathParaPr>
-                    <m:oMath xmlns:m="http://schemas.openxmlformats.org/officeDocument/2006/math">
+                    <m:oMath>
                       <m:r>
                         <a:rPr lang="en-US" altLang="zh-TW" sz="2400" b="0" i="1" smtClean="0">
                           <a:latin typeface="Cambria Math" panose="02040503050406030204" pitchFamily="18" charset="0"/>
@@ -4377,9 +4374,7 @@
                       <m:f>
                         <m:fPr>
                           <m:ctrlPr>
-                            <a:rPr lang="en-US" altLang="zh-TW" sz="2400" b="0" i="1" dirty="0" smtClean="0">
-                              <a:latin typeface="Cambria Math" panose="02040503050406030204" pitchFamily="18" charset="0"/>
-                            </a:rPr>
+                            <a:rPr lang="en-US" altLang="zh-TW" sz="2400" b="0" i="0" dirty="0" smtClean="0"/>
                           </m:ctrlPr>
                         </m:fPr>
                         <m:num>
@@ -4388,42 +4383,7 @@
                               <m:nor/>
                             </m:rPr>
                             <a:rPr lang="en-US" altLang="zh-TW" sz="2400" b="0" i="0" dirty="0" smtClean="0"/>
-                            <m:t>Number</m:t>
-                          </m:r>
-                          <m:r>
-                            <m:rPr>
-                              <m:nor/>
-                            </m:rPr>
-                            <a:rPr lang="en-US" altLang="zh-TW" sz="2400" b="0" i="0" dirty="0" smtClean="0"/>
-                            <m:t> </m:t>
-                          </m:r>
-                          <m:r>
-                            <m:rPr>
-                              <m:nor/>
-                            </m:rPr>
-                            <a:rPr lang="en-US" altLang="zh-TW" sz="2400" b="0" i="0" dirty="0" smtClean="0"/>
-                            <m:t>of</m:t>
-                          </m:r>
-                          <m:r>
-                            <m:rPr>
-                              <m:nor/>
-                            </m:rPr>
-                            <a:rPr lang="en-US" altLang="zh-TW" sz="2400" b="0" i="0" dirty="0" smtClean="0"/>
-                            <m:t> </m:t>
-                          </m:r>
-                          <m:r>
-                            <m:rPr>
-                              <m:nor/>
-                            </m:rPr>
-                            <a:rPr lang="en-US" altLang="zh-TW" sz="2400" b="0" i="0" dirty="0" smtClean="0"/>
-                            <m:t>Times</m:t>
-                          </m:r>
-                          <m:r>
-                            <m:rPr>
-                              <m:nor/>
-                            </m:rPr>
-                            <a:rPr lang="en-US" altLang="zh-TW" sz="2400" b="0" i="0" dirty="0" smtClean="0"/>
-                            <m:t> </m:t>
+                            <m:t>Number of Times </m:t>
                           </m:r>
                           <m:r>
                             <a:rPr lang="en-US" altLang="zh-TW" sz="2400" i="1">
@@ -4451,49 +4411,7 @@
                               <m:nor/>
                             </m:rPr>
                             <a:rPr lang="en-US" altLang="zh-TW" sz="2400" b="0" i="0" dirty="0" smtClean="0"/>
-                            <m:t>Total</m:t>
-                          </m:r>
-                          <m:r>
-                            <m:rPr>
-                              <m:nor/>
-                            </m:rPr>
-                            <a:rPr lang="en-US" altLang="zh-TW" sz="2400" b="0" i="0" dirty="0" smtClean="0"/>
-                            <m:t> </m:t>
-                          </m:r>
-                          <m:r>
-                            <m:rPr>
-                              <m:nor/>
-                            </m:rPr>
-                            <a:rPr lang="en-US" altLang="zh-TW" sz="2400" b="0" i="0" dirty="0" smtClean="0"/>
-                            <m:t>Number</m:t>
-                          </m:r>
-                          <m:r>
-                            <m:rPr>
-                              <m:nor/>
-                            </m:rPr>
-                            <a:rPr lang="en-US" altLang="zh-TW" sz="2400" b="0" i="0" dirty="0" smtClean="0"/>
-                            <m:t> </m:t>
-                          </m:r>
-                          <m:r>
-                            <m:rPr>
-                              <m:nor/>
-                            </m:rPr>
-                            <a:rPr lang="en-US" altLang="zh-TW" sz="2400" b="0" i="0" dirty="0" smtClean="0"/>
-                            <m:t>of</m:t>
-                          </m:r>
-                          <m:r>
-                            <m:rPr>
-                              <m:nor/>
-                            </m:rPr>
-                            <a:rPr lang="en-US" altLang="zh-TW" sz="2400" b="0" i="0" dirty="0" smtClean="0"/>
-                            <m:t> </m:t>
-                          </m:r>
-                          <m:r>
-                            <m:rPr>
-                              <m:nor/>
-                            </m:rPr>
-                            <a:rPr lang="en-US" altLang="zh-TW" sz="2400" b="0" i="0" dirty="0" smtClean="0"/>
-                            <m:t>Trials</m:t>
+                            <m:t>Total Number of Trials</m:t>
                           </m:r>
                         </m:den>
                       </m:f>
@@ -4611,10 +4529,7 @@
                 </a:pPr>
                 <a14:m>
                   <m:oMathPara xmlns:m="http://schemas.openxmlformats.org/officeDocument/2006/math">
-                    <m:oMathParaPr>
-                      <m:jc m:val="centerGroup"/>
-                    </m:oMathParaPr>
-                    <m:oMath xmlns:m="http://schemas.openxmlformats.org/officeDocument/2006/math">
+                    <m:oMath>
                       <m:r>
                         <a:rPr lang="en-US" altLang="zh-TW" sz="2400" b="0" i="1" smtClean="0">
                           <a:latin typeface="Cambria Math" panose="02040503050406030204" pitchFamily="18" charset="0"/>
@@ -8892,10 +8807,7 @@
                 </a:pPr>
                 <a14:m>
                   <m:oMathPara xmlns:m="http://schemas.openxmlformats.org/officeDocument/2006/math">
-                    <m:oMathParaPr>
-                      <m:jc m:val="centerGroup"/>
-                    </m:oMathParaPr>
-                    <m:oMath xmlns:m="http://schemas.openxmlformats.org/officeDocument/2006/math">
+                    <m:oMath>
                       <m:r>
                         <a:rPr lang="en-US" altLang="zh-TW" sz="2400" b="0" i="1" smtClean="0">
                           <a:latin typeface="Cambria Math" panose="02040503050406030204" pitchFamily="18" charset="0"/>
@@ -9120,10 +9032,7 @@
                 </a:pPr>
                 <a14:m>
                   <m:oMathPara xmlns:m="http://schemas.openxmlformats.org/officeDocument/2006/math">
-                    <m:oMathParaPr>
-                      <m:jc m:val="centerGroup"/>
-                    </m:oMathParaPr>
-                    <m:oMath xmlns:m="http://schemas.openxmlformats.org/officeDocument/2006/math">
+                    <m:oMath>
                       <m:r>
                         <a:rPr lang="en-US" altLang="zh-TW" sz="2400" b="0" i="1" smtClean="0">
                           <a:latin typeface="Cambria Math" panose="02040503050406030204" pitchFamily="18" charset="0"/>
@@ -9313,10 +9222,7 @@
                 </a:pPr>
                 <a14:m>
                   <m:oMathPara xmlns:m="http://schemas.openxmlformats.org/officeDocument/2006/math">
-                    <m:oMathParaPr>
-                      <m:jc m:val="centerGroup"/>
-                    </m:oMathParaPr>
-                    <m:oMath xmlns:m="http://schemas.openxmlformats.org/officeDocument/2006/math">
+                    <m:oMath>
                       <m:r>
                         <a:rPr lang="en-US" altLang="zh-TW" sz="2400" b="0" i="1" smtClean="0">
                           <a:latin typeface="Cambria Math" panose="02040503050406030204" pitchFamily="18" charset="0"/>
@@ -11568,10 +11474,7 @@
                 </a:pPr>
                 <a14:m>
                   <m:oMathPara xmlns:m="http://schemas.openxmlformats.org/officeDocument/2006/math">
-                    <m:oMathParaPr>
-                      <m:jc m:val="centerGroup"/>
-                    </m:oMathParaPr>
-                    <m:oMath xmlns:m="http://schemas.openxmlformats.org/officeDocument/2006/math">
+                    <m:oMath>
                       <m:r>
                         <a:rPr lang="en-US" altLang="zh-TW" sz="2400" i="1">
                           <a:latin typeface="Cambria Math" panose="02040503050406030204" pitchFamily="18" charset="0"/>
@@ -11797,10 +11700,7 @@
                 </a:pPr>
                 <a14:m>
                   <m:oMathPara xmlns:m="http://schemas.openxmlformats.org/officeDocument/2006/math">
-                    <m:oMathParaPr>
-                      <m:jc m:val="centerGroup"/>
-                    </m:oMathParaPr>
-                    <m:oMath xmlns:m="http://schemas.openxmlformats.org/officeDocument/2006/math">
+                    <m:oMath>
                       <m:r>
                         <a:rPr lang="en-US" altLang="zh-TW" sz="2400" b="0" i="1" smtClean="0">
                           <a:latin typeface="Cambria Math" panose="02040503050406030204" pitchFamily="18" charset="0"/>
@@ -11956,10 +11856,7 @@
                 </a:pPr>
                 <a14:m>
                   <m:oMathPara xmlns:m="http://schemas.openxmlformats.org/officeDocument/2006/math">
-                    <m:oMathParaPr>
-                      <m:jc m:val="centerGroup"/>
-                    </m:oMathParaPr>
-                    <m:oMath xmlns:m="http://schemas.openxmlformats.org/officeDocument/2006/math">
+                    <m:oMath>
                       <m:r>
                         <a:rPr lang="en-US" altLang="zh-TW" sz="2400" b="0" i="1" smtClean="0">
                           <a:latin typeface="Cambria Math" panose="02040503050406030204" pitchFamily="18" charset="0"/>
@@ -12868,8 +12765,8 @@
           <a:chExt cx="0" cy="0"/>
         </a:xfrm>
       </p:grpSpPr>
-      <mc:AlternateContent xmlns:mc="http://schemas.openxmlformats.org/markup-compatibility/2006">
-        <mc:Choice xmlns:a14="http://schemas.microsoft.com/office/drawing/2010/main" Requires="a14">
+      <mc:AlternateContent xmlns:mc="http://schemas.openxmlformats.org/markup-compatibility/2006" xmlns:a14="http://schemas.microsoft.com/office/drawing/2010/main">
+        <mc:Choice Requires="a14">
           <p:sp>
             <p:nvSpPr>
               <p:cNvPr id="3" name="Content Placeholder 2">
@@ -12989,10 +12886,7 @@
                 </a:pPr>
                 <a14:m>
                   <m:oMathPara xmlns:m="http://schemas.openxmlformats.org/officeDocument/2006/math">
-                    <m:oMathParaPr>
-                      <m:jc m:val="centerGroup"/>
-                    </m:oMathParaPr>
-                    <m:oMath xmlns:m="http://schemas.openxmlformats.org/officeDocument/2006/math">
+                    <m:oMath>
                       <m:r>
                         <a:rPr lang="en-US" altLang="zh-TW" sz="2400" i="1" dirty="0">
                           <a:latin typeface="Cambria Math" panose="02040503050406030204" pitchFamily="18" charset="0"/>
@@ -13242,10 +13136,7 @@
                 </a:pPr>
                 <a14:m>
                   <m:oMathPara xmlns:m="http://schemas.openxmlformats.org/officeDocument/2006/math">
-                    <m:oMathParaPr>
-                      <m:jc m:val="centerGroup"/>
-                    </m:oMathParaPr>
-                    <m:oMath xmlns:m="http://schemas.openxmlformats.org/officeDocument/2006/math">
+                    <m:oMath>
                       <m:r>
                         <a:rPr lang="en-US" altLang="zh-TW" sz="2400" i="1" dirty="0">
                           <a:latin typeface="Cambria Math" panose="02040503050406030204" pitchFamily="18" charset="0"/>
@@ -13430,10 +13321,7 @@
                 </a:pPr>
                 <a14:m>
                   <m:oMathPara xmlns:m="http://schemas.openxmlformats.org/officeDocument/2006/math">
-                    <m:oMathParaPr>
-                      <m:jc m:val="centerGroup"/>
-                    </m:oMathParaPr>
-                    <m:oMath xmlns:m="http://schemas.openxmlformats.org/officeDocument/2006/math">
+                    <m:oMath>
                       <m:sSup>
                         <m:sSupPr>
                           <m:ctrlPr>
@@ -13550,7 +13438,7 @@
             </p:txBody>
           </p:sp>
         </mc:Choice>
-        <mc:Fallback>
+        <mc:Fallback xmlns="">
           <p:sp>
             <p:nvSpPr>
               <p:cNvPr id="3" name="Content Placeholder 2">
@@ -15567,10 +15455,7 @@
                 </a:pPr>
                 <a14:m>
                   <m:oMathPara xmlns:m="http://schemas.openxmlformats.org/officeDocument/2006/math">
-                    <m:oMathParaPr>
-                      <m:jc m:val="centerGroup"/>
-                    </m:oMathParaPr>
-                    <m:oMath xmlns:m="http://schemas.openxmlformats.org/officeDocument/2006/math">
+                    <m:oMath>
                       <m:r>
                         <a:rPr lang="en-US" altLang="zh-TW" sz="2400" b="0" i="1" smtClean="0">
                           <a:latin typeface="Cambria Math" panose="02040503050406030204" pitchFamily="18" charset="0"/>
@@ -15803,10 +15688,7 @@
                 </a:pPr>
                 <a14:m>
                   <m:oMathPara xmlns:m="http://schemas.openxmlformats.org/officeDocument/2006/math">
-                    <m:oMathParaPr>
-                      <m:jc m:val="centerGroup"/>
-                    </m:oMathParaPr>
-                    <m:oMath xmlns:m="http://schemas.openxmlformats.org/officeDocument/2006/math">
+                    <m:oMath>
                       <m:r>
                         <a:rPr lang="en-US" altLang="zh-TW" sz="2400" i="1" dirty="0">
                           <a:latin typeface="Cambria Math" panose="02040503050406030204" pitchFamily="18" charset="0"/>
@@ -16803,10 +16685,7 @@
                 </a:pPr>
                 <a14:m>
                   <m:oMathPara xmlns:m="http://schemas.openxmlformats.org/officeDocument/2006/math">
-                    <m:oMathParaPr>
-                      <m:jc m:val="centerGroup"/>
-                    </m:oMathParaPr>
-                    <m:oMath xmlns:m="http://schemas.openxmlformats.org/officeDocument/2006/math">
+                    <m:oMath>
                       <m:r>
                         <a:rPr lang="en-US" altLang="zh-TW" sz="2400" b="0" i="1" smtClean="0">
                           <a:latin typeface="Cambria Math" panose="02040503050406030204" pitchFamily="18" charset="0"/>
@@ -19381,10 +19260,7 @@
                 </a:pPr>
                 <a14:m>
                   <m:oMathPara xmlns:m="http://schemas.openxmlformats.org/officeDocument/2006/math">
-                    <m:oMathParaPr>
-                      <m:jc m:val="centerGroup"/>
-                    </m:oMathParaPr>
-                    <m:oMath xmlns:m="http://schemas.openxmlformats.org/officeDocument/2006/math">
+                    <m:oMath>
                       <m:r>
                         <a:rPr lang="en-US" altLang="zh-TW" sz="2400" i="1" dirty="0">
                           <a:latin typeface="Cambria Math" panose="02040503050406030204" pitchFamily="18" charset="0"/>
@@ -20400,10 +20276,7 @@
                 </a:pPr>
                 <a14:m>
                   <m:oMathPara xmlns:m="http://schemas.openxmlformats.org/officeDocument/2006/math">
-                    <m:oMathParaPr>
-                      <m:jc m:val="centerGroup"/>
-                    </m:oMathParaPr>
-                    <m:oMath xmlns:m="http://schemas.openxmlformats.org/officeDocument/2006/math">
+                    <m:oMath>
                       <m:r>
                         <a:rPr lang="en-US" altLang="zh-TW" sz="2400" b="0" i="1" smtClean="0">
                           <a:latin typeface="Cambria Math" panose="02040503050406030204" pitchFamily="18" charset="0"/>
@@ -20546,10 +20419,7 @@
                 </a:pPr>
                 <a14:m>
                   <m:oMathPara xmlns:m="http://schemas.openxmlformats.org/officeDocument/2006/math">
-                    <m:oMathParaPr>
-                      <m:jc m:val="centerGroup"/>
-                    </m:oMathParaPr>
-                    <m:oMath xmlns:m="http://schemas.openxmlformats.org/officeDocument/2006/math">
+                    <m:oMath>
                       <m:r>
                         <a:rPr lang="en-US" altLang="zh-TW" sz="2400" i="1">
                           <a:latin typeface="Cambria Math" panose="02040503050406030204" pitchFamily="18" charset="0"/>
@@ -21767,10 +21637,7 @@
                 </a:pPr>
                 <a14:m>
                   <m:oMathPara xmlns:m="http://schemas.openxmlformats.org/officeDocument/2006/math">
-                    <m:oMathParaPr>
-                      <m:jc m:val="centerGroup"/>
-                    </m:oMathParaPr>
-                    <m:oMath xmlns:m="http://schemas.openxmlformats.org/officeDocument/2006/math">
+                    <m:oMath>
                       <m:r>
                         <a:rPr lang="en-US" altLang="zh-TW" sz="2400" b="0" i="1" smtClean="0">
                           <a:latin typeface="Cambria Math" panose="02040503050406030204" pitchFamily="18" charset="0"/>
@@ -22749,10 +22616,7 @@
                 </a:pPr>
                 <a14:m>
                   <m:oMathPara xmlns:m="http://schemas.openxmlformats.org/officeDocument/2006/math">
-                    <m:oMathParaPr>
-                      <m:jc m:val="centerGroup"/>
-                    </m:oMathParaPr>
-                    <m:oMath xmlns:m="http://schemas.openxmlformats.org/officeDocument/2006/math">
+                    <m:oMath>
                       <m:r>
                         <a:rPr lang="en-US" altLang="zh-TW" sz="2400" b="0" i="1" smtClean="0">
                           <a:latin typeface="Cambria Math" panose="02040503050406030204" pitchFamily="18" charset="0"/>
@@ -22941,10 +22805,7 @@
                 </a:pPr>
                 <a14:m>
                   <m:oMathPara xmlns:m="http://schemas.openxmlformats.org/officeDocument/2006/math">
-                    <m:oMathParaPr>
-                      <m:jc m:val="centerGroup"/>
-                    </m:oMathParaPr>
-                    <m:oMath xmlns:m="http://schemas.openxmlformats.org/officeDocument/2006/math">
+                    <m:oMath>
                       <m:r>
                         <a:rPr lang="en-US" altLang="zh-TW" sz="2400" b="0" i="1" smtClean="0">
                           <a:latin typeface="Cambria Math" panose="02040503050406030204" pitchFamily="18" charset="0"/>
@@ -23889,10 +23750,7 @@
                 </a:pPr>
                 <a14:m>
                   <m:oMathPara xmlns:m="http://schemas.openxmlformats.org/officeDocument/2006/math">
-                    <m:oMathParaPr>
-                      <m:jc m:val="centerGroup"/>
-                    </m:oMathParaPr>
-                    <m:oMath xmlns:m="http://schemas.openxmlformats.org/officeDocument/2006/math">
+                    <m:oMath>
                       <m:r>
                         <a:rPr lang="en-US" altLang="zh-TW" sz="2400" b="0" i="1" smtClean="0">
                           <a:latin typeface="Cambria Math" panose="02040503050406030204" pitchFamily="18" charset="0"/>
@@ -24124,10 +23982,7 @@
                 </a:pPr>
                 <a14:m>
                   <m:oMathPara xmlns:m="http://schemas.openxmlformats.org/officeDocument/2006/math">
-                    <m:oMathParaPr>
-                      <m:jc m:val="centerGroup"/>
-                    </m:oMathParaPr>
-                    <m:oMath xmlns:m="http://schemas.openxmlformats.org/officeDocument/2006/math">
+                    <m:oMath>
                       <m:r>
                         <a:rPr lang="en-US" altLang="zh-TW" sz="2400" b="0" i="1" smtClean="0">
                           <a:latin typeface="Cambria Math" panose="02040503050406030204" pitchFamily="18" charset="0"/>
@@ -25217,10 +25072,7 @@
                 </a:pPr>
                 <a14:m>
                   <m:oMathPara xmlns:m="http://schemas.openxmlformats.org/officeDocument/2006/math">
-                    <m:oMathParaPr>
-                      <m:jc m:val="centerGroup"/>
-                    </m:oMathParaPr>
-                    <m:oMath xmlns:m="http://schemas.openxmlformats.org/officeDocument/2006/math">
+                    <m:oMath>
                       <m:r>
                         <a:rPr lang="en-US" altLang="zh-TW" sz="2400" i="1">
                           <a:latin typeface="Cambria Math" panose="02040503050406030204" pitchFamily="18" charset="0"/>
@@ -27272,10 +27124,7 @@
                 </a:pPr>
                 <a14:m>
                   <m:oMathPara xmlns:m="http://schemas.openxmlformats.org/officeDocument/2006/math">
-                    <m:oMathParaPr>
-                      <m:jc m:val="centerGroup"/>
-                    </m:oMathParaPr>
-                    <m:oMath xmlns:m="http://schemas.openxmlformats.org/officeDocument/2006/math">
+                    <m:oMath>
                       <m:r>
                         <a:rPr lang="en-US" sz="2400" b="0" i="1" smtClean="0">
                           <a:latin typeface="Cambria Math" panose="02040503050406030204" pitchFamily="18" charset="0"/>
@@ -27422,10 +27271,7 @@
                 </a:pPr>
                 <a14:m>
                   <m:oMathPara xmlns:m="http://schemas.openxmlformats.org/officeDocument/2006/math">
-                    <m:oMathParaPr>
-                      <m:jc m:val="centerGroup"/>
-                    </m:oMathParaPr>
-                    <m:oMath xmlns:m="http://schemas.openxmlformats.org/officeDocument/2006/math">
+                    <m:oMath>
                       <m:r>
                         <a:rPr lang="en-US" sz="2400" i="1">
                           <a:latin typeface="Cambria Math" panose="02040503050406030204" pitchFamily="18" charset="0"/>
@@ -27533,10 +27379,7 @@
                 </a:pPr>
                 <a14:m>
                   <m:oMathPara xmlns:m="http://schemas.openxmlformats.org/officeDocument/2006/math">
-                    <m:oMathParaPr>
-                      <m:jc m:val="centerGroup"/>
-                    </m:oMathParaPr>
-                    <m:oMath xmlns:m="http://schemas.openxmlformats.org/officeDocument/2006/math">
+                    <m:oMath>
                       <m:r>
                         <a:rPr lang="en-US" altLang="zh-TW" sz="2400" b="0" i="1" smtClean="0">
                           <a:latin typeface="Cambria Math" panose="02040503050406030204" pitchFamily="18" charset="0"/>
@@ -27565,91 +27408,7 @@
                               <m:nor/>
                             </m:rPr>
                             <a:rPr lang="en-US" altLang="zh-TW" sz="2400" i="0" dirty="0"/>
-                            <m:t>at</m:t>
-                          </m:r>
-                          <m:r>
-                            <m:rPr>
-                              <m:nor/>
-                            </m:rPr>
-                            <a:rPr lang="en-US" altLang="zh-TW" sz="2400" i="0" dirty="0"/>
-                            <m:t> </m:t>
-                          </m:r>
-                          <m:r>
-                            <m:rPr>
-                              <m:nor/>
-                            </m:rPr>
-                            <a:rPr lang="en-US" altLang="zh-TW" sz="2400" i="0" dirty="0"/>
-                            <m:t>least</m:t>
-                          </m:r>
-                          <m:r>
-                            <m:rPr>
-                              <m:nor/>
-                            </m:rPr>
-                            <a:rPr lang="en-US" altLang="zh-TW" sz="2400" i="0" dirty="0"/>
-                            <m:t> </m:t>
-                          </m:r>
-                          <m:r>
-                            <m:rPr>
-                              <m:nor/>
-                            </m:rPr>
-                            <a:rPr lang="en-US" altLang="zh-TW" sz="2400" i="0" dirty="0"/>
-                            <m:t>one</m:t>
-                          </m:r>
-                          <m:r>
-                            <m:rPr>
-                              <m:nor/>
-                            </m:rPr>
-                            <a:rPr lang="en-US" altLang="zh-TW" sz="2400" i="0" dirty="0"/>
-                            <m:t> </m:t>
-                          </m:r>
-                          <m:r>
-                            <m:rPr>
-                              <m:nor/>
-                            </m:rPr>
-                            <a:rPr lang="en-US" altLang="zh-TW" sz="2400" i="0" dirty="0"/>
-                            <m:t>child</m:t>
-                          </m:r>
-                          <m:r>
-                            <m:rPr>
-                              <m:nor/>
-                            </m:rPr>
-                            <a:rPr lang="en-US" altLang="zh-TW" sz="2400" i="0" dirty="0"/>
-                            <m:t> </m:t>
-                          </m:r>
-                          <m:r>
-                            <m:rPr>
-                              <m:nor/>
-                            </m:rPr>
-                            <a:rPr lang="en-US" altLang="zh-TW" sz="2400" i="0" dirty="0"/>
-                            <m:t>is</m:t>
-                          </m:r>
-                          <m:r>
-                            <m:rPr>
-                              <m:nor/>
-                            </m:rPr>
-                            <a:rPr lang="en-US" altLang="zh-TW" sz="2400" i="0" dirty="0"/>
-                            <m:t> </m:t>
-                          </m:r>
-                          <m:r>
-                            <m:rPr>
-                              <m:nor/>
-                            </m:rPr>
-                            <a:rPr lang="en-US" altLang="zh-TW" sz="2400" i="0" dirty="0"/>
-                            <m:t>a</m:t>
-                          </m:r>
-                          <m:r>
-                            <m:rPr>
-                              <m:nor/>
-                            </m:rPr>
-                            <a:rPr lang="en-US" altLang="zh-TW" sz="2400" i="0" dirty="0"/>
-                            <m:t> </m:t>
-                          </m:r>
-                          <m:r>
-                            <m:rPr>
-                              <m:nor/>
-                            </m:rPr>
-                            <a:rPr lang="en-US" altLang="zh-TW" sz="2400" i="0" dirty="0"/>
-                            <m:t>boy</m:t>
+                            <m:t>at least one child is a boy</m:t>
                           </m:r>
                         </m:e>
                       </m:d>
@@ -29392,7 +29151,7 @@
             </a:pPr>
             <a:r>
               <a:rPr lang="en-US" altLang="zh-TW" sz="2400" dirty="0"/>
-              <a:t>The purpose of descriptive statistics is to organize data so that patterns become easier to see and interpret.</a:t>
+              <a:t>Takeaway: We covered the basic tools of probability for describing and reasoning about uncertainty.</a:t>
             </a:r>
             <a:endParaRPr lang="en-US" altLang="zh-TW" sz="2000" dirty="0"/>
           </a:p>
@@ -30990,7 +30749,15 @@
             </a:r>
             <a:r>
               <a:rPr lang="en-US" altLang="zh-TW" sz="2400" dirty="0"/>
-              <a:t> is a process in that:</a:t>
+              <a:t> is a </a:t>
+            </a:r>
+            <a:r>
+              <a:rPr lang="en-US" altLang="zh-TW" sz="2400"/>
+              <a:t>process that</a:t>
+            </a:r>
+            <a:r>
+              <a:rPr lang="en-US" altLang="zh-TW" sz="2400" dirty="0"/>
+              <a:t>:</a:t>
             </a:r>
           </a:p>
           <a:p>
@@ -34679,10 +34446,7 @@
                 </a:pPr>
                 <a14:m>
                   <m:oMathPara xmlns:m="http://schemas.openxmlformats.org/officeDocument/2006/math">
-                    <m:oMathParaPr>
-                      <m:jc m:val="centerGroup"/>
-                    </m:oMathParaPr>
-                    <m:oMath xmlns:m="http://schemas.openxmlformats.org/officeDocument/2006/math">
+                    <m:oMath>
                       <m:nary>
                         <m:naryPr>
                           <m:chr m:val="∑"/>
@@ -35591,10 +35355,7 @@
                 </a:pPr>
                 <a14:m>
                   <m:oMathPara xmlns:m="http://schemas.openxmlformats.org/officeDocument/2006/math">
-                    <m:oMathParaPr>
-                      <m:jc m:val="centerGroup"/>
-                    </m:oMathParaPr>
-                    <m:oMath xmlns:m="http://schemas.openxmlformats.org/officeDocument/2006/math">
+                    <m:oMath>
                       <m:r>
                         <a:rPr lang="en-US" altLang="zh-TW" sz="2400" b="0" i="1" smtClean="0">
                           <a:latin typeface="Cambria Math" panose="02040503050406030204" pitchFamily="18" charset="0"/>
